--- a/devsecops/deliverables/DevSecOps_Slides.pptx
+++ b/devsecops/deliverables/DevSecOps_Slides.pptx
@@ -2154,7 +2154,7 @@
                   <a:srgbClr val="FFFFFF"/>
                 </a:solidFill>
               </a:rPr>
-              <a:t>Group 1: Abdul-Ramon Adeyemi Folarin  ·  Immanuel Guarin  ·  Sherman Law  ·  Suranjit Paul</a:t>
+              <a:t>Group 1: Abdul-Ramon Adeyemi Folarin  ·  Immanuel Guarin  ·  Sherman Law</a:t>
             </a:r>
             <a:endParaRPr lang="en-US" sz="1400" dirty="0"/>
           </a:p>
@@ -2169,7 +2169,7 @@
         <p:spPr>
           <a:xfrm>
             <a:off x="731520" y="5897880"/>
-            <a:ext cx="9144000" cy="320040"/>
+            <a:ext cx="9601200" cy="320040"/>
           </a:xfrm>
           <a:prstGeom prst="rect">
             <a:avLst/>
@@ -2190,7 +2190,7 @@
                   <a:srgbClr val="D8DCE4"/>
                 </a:solidFill>
               </a:rPr>
-              <a:t>Application Security Methodology  |  Instructor: Mark Shtern  |  August 2026</a:t>
+              <a:t>Application Security Methodology  |  Instructors: Suranjit Paul &amp; Mark Shtern  |  August 2026</a:t>
             </a:r>
             <a:endParaRPr lang="en-US" sz="1200" dirty="0"/>
           </a:p>

--- a/devsecops/deliverables/DevSecOps_Slides.pptx
+++ b/devsecops/deliverables/DevSecOps_Slides.pptx
@@ -6307,7 +6307,7 @@
                   <a:srgbClr val="232A33"/>
                 </a:solidFill>
               </a:rPr>
-              <a:t>GHSA-pjrx-mwv9-j9vf was rejected: documented behavior, super-admin-only by default. Verify the documented threat model before filing.</a:t>
+              <a:t>GHSA-pjrx-mwv9-j9vf: first declined as 'documented behavior' - then patched upstream exactly as proposed (kimai/kimai PR #6089, merged Aug 2026). A well-argued report lands even when the first answer is 'by design'.</a:t>
             </a:r>
             <a:endParaRPr lang="en-US" sz="1150" dirty="0"/>
           </a:p>
@@ -7135,7 +7135,7 @@
                   <a:srgbClr val="D8DCE4"/>
                 </a:solidFill>
               </a:rPr>
-              <a:t>Read the documented threat model before filing (rejected advisory)</a:t>
+              <a:t>A well-argued report lands even after a 'by design' answer (GHSA-pjrx patched upstream)</a:t>
             </a:r>
             <a:endParaRPr lang="en-US" sz="1500" dirty="0"/>
           </a:p>
